--- a/decks/geog-glaciers/geog-glaciers_ch3_ice-at-work.pptx
+++ b/decks/geog-glaciers/geog-glaciers_ch3_ice-at-work.pptx
@@ -126,30 +126,30 @@
   <p:extLst>
     <p:ext uri="{521415D9-36F7-43E2-AB2F-B90AF26B5E84}">
       <p14:sectionLst xmlns:p14="http://schemas.microsoft.com/office/powerpoint/2010/main">
-        <p14:section name="Opening" id="{e740fc85-e843-fb6c-c2c1-e39a60afd8a4}">
+        <p14:section name="Opening" id="{af250348-d3e1-f29a-a4e5-1aabc1d626ea}">
           <p14:sldIdLst>
             <p14:sldId id="256"/>
           </p14:sldIdLst>
         </p14:section>
-        <p14:section name="Gate" id="{0d9acc2e-4a65-5613-3936-1fb40814b602}">
+        <p14:section name="Gate" id="{b76f51b4-e37a-afed-0e9f-c7f3be62c3ff}">
           <p14:sldIdLst>
             <p14:sldId id="257"/>
             <p14:sldId id="258"/>
           </p14:sldIdLst>
         </p14:section>
-        <p14:section name="Pre-teach" id="{d33f0114-0e45-1b0b-a97b-a26ce0439829}">
+        <p14:section name="Pre-teach" id="{626acffd-c83f-d907-05ca-02125173ffe1}">
           <p14:sldIdLst>
             <p14:sldId id="259"/>
             <p14:sldId id="260"/>
           </p14:sldIdLst>
         </p14:section>
-        <p14:section name="Read-along" id="{388e98cf-cf2a-c153-b0c9-d57a3f0b5efe}">
+        <p14:section name="Read-along" id="{51558a12-41e5-2ff3-c5ae-01b1010f75f7}">
           <p14:sldIdLst>
             <p14:sldId id="261"/>
             <p14:sldId id="262"/>
           </p14:sldIdLst>
         </p14:section>
-        <p14:section name="Teach" id="{49bf19cd-f611-c5fd-9c9e-6e3399734765}">
+        <p14:section name="Teach" id="{4a8e7021-dbc5-87c2-6719-08d93a8b1217}">
           <p14:sldIdLst>
             <p14:sldId id="263"/>
             <p14:sldId id="264"/>
@@ -158,7 +158,7 @@
             <p14:sldId id="267"/>
           </p14:sldIdLst>
         </p14:section>
-        <p14:section name="Routes" id="{fe34158d-9bf7-e82f-b0dc-072c815865f8}">
+        <p14:section name="Routes" id="{5469ee9e-0509-d45e-20c0-6ae011c00f44}">
           <p14:sldIdLst>
             <p14:sldId id="268"/>
             <p14:sldId id="269"/>
@@ -166,12 +166,12 @@
             <p14:sldId id="271"/>
           </p14:sldIdLst>
         </p14:section>
-        <p14:section name="Close" id="{a0995dea-d505-3fae-d8db-1cf8e3a5a392}">
+        <p14:section name="Close" id="{5ea5cc24-1087-83f6-08e2-3107ba0a50f3}">
           <p14:sldIdLst>
             <p14:sldId id="272"/>
           </p14:sldIdLst>
         </p14:section>
-        <p14:section name="Answers" id="{dabc8d81-29ad-03a2-0bed-f6d7796b58e2}">
+        <p14:section name="Answers" id="{f172a1b8-bc91-f3f2-5dae-337aeab4af7e}">
           <p14:sldIdLst>
             <p14:sldId id="273"/>
             <p14:sldId id="274"/>
